--- a/slides/Week03_GitHub_Workflow_v1.3.pptx
+++ b/slides/Week03_GitHub_Workflow_v1.3.pptx
@@ -2881,622 +2881,810 @@
 </file>
 
 <file path=ppt/slideMasters/slideMaster1.xml><?xml version="1.0" encoding="utf-8"?>
-<ns0:sldMaster xmlns:ns0="http://schemas.openxmlformats.org/presentationml/2006/main" xmlns:ns1="http://schemas.openxmlformats.org/drawingml/2006/main" xmlns:ns2="http://schemas.openxmlformats.org/officeDocument/2006/relationships">
-  <ns0:cSld>
-    <ns0:spTree>
-      <ns0:nvGrpSpPr>
-        <ns0:cNvPr id="1" name=""/>
-        <ns0:cNvGrpSpPr/>
-        <ns0:nvPr/>
-      </ns0:nvGrpSpPr>
-      <ns0:grpSpPr>
-        <ns1:xfrm>
-          <ns1:off x="0" y="0"/>
-          <ns1:ext cx="0" cy="0"/>
-          <ns1:chOff x="0" y="0"/>
-          <ns1:chExt cx="0" cy="0"/>
-        </ns1:xfrm>
-      </ns0:grpSpPr>
-    </ns0:spTree>
-  </ns0:cSld>
-  <ns0:clrMap bg1="lt1" tx1="dk1" bg2="lt2" tx2="dk2" accent1="accent1" accent2="accent2" accent3="accent3" accent4="accent4" accent5="accent5" accent6="accent6" hlink="hlink" folHlink="folHlink"/>
-  <ns0:sldLayoutIdLst>
-    <ns0:sldLayoutId id="2147483649" ns2:id="rId1"/>
-  </ns0:sldLayoutIdLst>
-  <ns0:hf sldNum="0" hdr="0" ftr="0" dt="0"/>
-  <ns0:txStyles>
-    <ns0:titleStyle>
-      <ns1:lvl1pPr algn="ctr" defTabSz="914400" rtl="0" eaLnBrk="1" latinLnBrk="0" hangingPunct="1">
-        <ns1:spcBef>
-          <ns1:spcPct val="0"/>
-        </ns1:spcBef>
-        <ns1:buNone/>
-        <ns1:defRPr sz="4400" kern="1200" lang="ja-JP">
-          <ns1:solidFill>
-            <ns1:schemeClr val="tx1"/>
-          </ns1:solidFill>
-          <ns1:latin typeface="Meiryo"/>
-          <ns1:ea typeface="Meiryo"/>
-          <ns1:cs typeface="Meiryo"/>
-        </ns1:defRPr>
-      </ns1:lvl1pPr>
-    </ns0:titleStyle>
-    <ns0:bodyStyle>
-      <ns1:lvl1pPr marL="342900" indent="-342900" algn="l" defTabSz="914400" rtl="0" eaLnBrk="1" latinLnBrk="0" hangingPunct="1">
-        <ns1:spcBef>
-          <ns1:spcPct val="20000"/>
-        </ns1:spcBef>
-        <ns1:buFont typeface="Meiryo" pitchFamily="34" charset="0"/>
-        <ns1:buChar char="•"/>
-        <ns1:defRPr sz="3200" kern="1200" lang="ja-JP">
-          <ns1:solidFill>
-            <ns1:schemeClr val="tx1"/>
-          </ns1:solidFill>
-          <ns1:latin typeface="Meiryo"/>
-          <ns1:ea typeface="Meiryo"/>
-          <ns1:cs typeface="Meiryo"/>
-        </ns1:defRPr>
-      </ns1:lvl1pPr>
-      <ns1:lvl2pPr marL="742950" indent="-285750" algn="l" defTabSz="914400" rtl="0" eaLnBrk="1" latinLnBrk="0" hangingPunct="1">
-        <ns1:spcBef>
-          <ns1:spcPct val="20000"/>
-        </ns1:spcBef>
-        <ns1:buFont typeface="Meiryo" pitchFamily="34" charset="0"/>
-        <ns1:buChar char="–"/>
-        <ns1:defRPr sz="2800" kern="1200" lang="ja-JP">
-          <ns1:solidFill>
-            <ns1:schemeClr val="tx1"/>
-          </ns1:solidFill>
-          <ns1:latin typeface="Meiryo"/>
-          <ns1:ea typeface="Meiryo"/>
-          <ns1:cs typeface="Meiryo"/>
-        </ns1:defRPr>
-      </ns1:lvl2pPr>
-      <ns1:lvl3pPr marL="1143000" indent="-228600" algn="l" defTabSz="914400" rtl="0" eaLnBrk="1" latinLnBrk="0" hangingPunct="1">
-        <ns1:spcBef>
-          <ns1:spcPct val="20000"/>
-        </ns1:spcBef>
-        <ns1:buFont typeface="Meiryo" pitchFamily="34" charset="0"/>
-        <ns1:buChar char="•"/>
-        <ns1:defRPr sz="2400" kern="1200" lang="ja-JP">
-          <ns1:solidFill>
-            <ns1:schemeClr val="tx1"/>
-          </ns1:solidFill>
-          <ns1:latin typeface="Meiryo"/>
-          <ns1:ea typeface="Meiryo"/>
-          <ns1:cs typeface="Meiryo"/>
-        </ns1:defRPr>
-      </ns1:lvl3pPr>
-      <ns1:lvl4pPr marL="1600200" indent="-228600" algn="l" defTabSz="914400" rtl="0" eaLnBrk="1" latinLnBrk="0" hangingPunct="1">
-        <ns1:spcBef>
-          <ns1:spcPct val="20000"/>
-        </ns1:spcBef>
-        <ns1:buFont typeface="Meiryo" pitchFamily="34" charset="0"/>
-        <ns1:buChar char="–"/>
-        <ns1:defRPr sz="2000" kern="1200" lang="ja-JP">
-          <ns1:solidFill>
-            <ns1:schemeClr val="tx1"/>
-          </ns1:solidFill>
-          <ns1:latin typeface="Meiryo"/>
-          <ns1:ea typeface="Meiryo"/>
-          <ns1:cs typeface="Meiryo"/>
-        </ns1:defRPr>
-      </ns1:lvl4pPr>
-      <ns1:lvl5pPr marL="2057400" indent="-228600" algn="l" defTabSz="914400" rtl="0" eaLnBrk="1" latinLnBrk="0" hangingPunct="1">
-        <ns1:spcBef>
-          <ns1:spcPct val="20000"/>
-        </ns1:spcBef>
-        <ns1:buFont typeface="Meiryo" pitchFamily="34" charset="0"/>
-        <ns1:buChar char="»"/>
-        <ns1:defRPr sz="2000" kern="1200" lang="ja-JP">
-          <ns1:solidFill>
-            <ns1:schemeClr val="tx1"/>
-          </ns1:solidFill>
-          <ns1:latin typeface="Meiryo"/>
-          <ns1:ea typeface="Meiryo"/>
-          <ns1:cs typeface="Meiryo"/>
-        </ns1:defRPr>
-      </ns1:lvl5pPr>
-      <ns1:lvl6pPr marL="2514600" indent="-228600" algn="l" defTabSz="914400" rtl="0" eaLnBrk="1" latinLnBrk="0" hangingPunct="1">
-        <ns1:spcBef>
-          <ns1:spcPct val="20000"/>
-        </ns1:spcBef>
-        <ns1:buFont typeface="Meiryo" pitchFamily="34" charset="0"/>
-        <ns1:buChar char="•"/>
-        <ns1:defRPr sz="2000" kern="1200" lang="ja-JP">
-          <ns1:solidFill>
-            <ns1:schemeClr val="tx1"/>
-          </ns1:solidFill>
-          <ns1:latin typeface="Meiryo"/>
-          <ns1:ea typeface="Meiryo"/>
-          <ns1:cs typeface="Meiryo"/>
-        </ns1:defRPr>
-      </ns1:lvl6pPr>
-      <ns1:lvl7pPr marL="2971800" indent="-228600" algn="l" defTabSz="914400" rtl="0" eaLnBrk="1" latinLnBrk="0" hangingPunct="1">
-        <ns1:spcBef>
-          <ns1:spcPct val="20000"/>
-        </ns1:spcBef>
-        <ns1:buFont typeface="Meiryo" pitchFamily="34" charset="0"/>
-        <ns1:buChar char="•"/>
-        <ns1:defRPr sz="2000" kern="1200" lang="ja-JP">
-          <ns1:solidFill>
-            <ns1:schemeClr val="tx1"/>
-          </ns1:solidFill>
-          <ns1:latin typeface="Meiryo"/>
-          <ns1:ea typeface="Meiryo"/>
-          <ns1:cs typeface="Meiryo"/>
-        </ns1:defRPr>
-      </ns1:lvl7pPr>
-      <ns1:lvl8pPr marL="3429000" indent="-228600" algn="l" defTabSz="914400" rtl="0" eaLnBrk="1" latinLnBrk="0" hangingPunct="1">
-        <ns1:spcBef>
-          <ns1:spcPct val="20000"/>
-        </ns1:spcBef>
-        <ns1:buFont typeface="Meiryo" pitchFamily="34" charset="0"/>
-        <ns1:buChar char="•"/>
-        <ns1:defRPr sz="2000" kern="1200" lang="ja-JP">
-          <ns1:solidFill>
-            <ns1:schemeClr val="tx1"/>
-          </ns1:solidFill>
-          <ns1:latin typeface="Meiryo"/>
-          <ns1:ea typeface="Meiryo"/>
-          <ns1:cs typeface="Meiryo"/>
-        </ns1:defRPr>
-      </ns1:lvl8pPr>
-      <ns1:lvl9pPr marL="3886200" indent="-228600" algn="l" defTabSz="914400" rtl="0" eaLnBrk="1" latinLnBrk="0" hangingPunct="1">
-        <ns1:spcBef>
-          <ns1:spcPct val="20000"/>
-        </ns1:spcBef>
-        <ns1:buFont typeface="Meiryo" pitchFamily="34" charset="0"/>
-        <ns1:buChar char="•"/>
-        <ns1:defRPr sz="2000" kern="1200" lang="ja-JP">
-          <ns1:solidFill>
-            <ns1:schemeClr val="tx1"/>
-          </ns1:solidFill>
-          <ns1:latin typeface="Meiryo"/>
-          <ns1:ea typeface="Meiryo"/>
-          <ns1:cs typeface="Meiryo"/>
-        </ns1:defRPr>
-      </ns1:lvl9pPr>
-    </ns0:bodyStyle>
-    <ns0:otherStyle>
-      <ns1:defPPr>
-        <ns1:defRPr lang="ja-JP">
-          <ns1:latin typeface="Meiryo"/>
-          <ns1:ea typeface="Meiryo"/>
-          <ns1:cs typeface="Meiryo"/>
-        </ns1:defRPr>
-      </ns1:defPPr>
-      <ns1:lvl1pPr marL="0" algn="l" defTabSz="914400" rtl="0" eaLnBrk="1" latinLnBrk="0" hangingPunct="1">
-        <ns1:defRPr sz="1800" kern="1200" lang="ja-JP">
-          <ns1:solidFill>
-            <ns1:schemeClr val="tx1"/>
-          </ns1:solidFill>
-          <ns1:latin typeface="Meiryo"/>
-          <ns1:ea typeface="Meiryo"/>
-          <ns1:cs typeface="Meiryo"/>
-        </ns1:defRPr>
-      </ns1:lvl1pPr>
-      <ns1:lvl2pPr marL="457200" algn="l" defTabSz="914400" rtl="0" eaLnBrk="1" latinLnBrk="0" hangingPunct="1">
-        <ns1:defRPr sz="1800" kern="1200" lang="ja-JP">
-          <ns1:solidFill>
-            <ns1:schemeClr val="tx1"/>
-          </ns1:solidFill>
-          <ns1:latin typeface="Meiryo"/>
-          <ns1:ea typeface="Meiryo"/>
-          <ns1:cs typeface="Meiryo"/>
-        </ns1:defRPr>
-      </ns1:lvl2pPr>
-      <ns1:lvl3pPr marL="914400" algn="l" defTabSz="914400" rtl="0" eaLnBrk="1" latinLnBrk="0" hangingPunct="1">
-        <ns1:defRPr sz="1800" kern="1200" lang="ja-JP">
-          <ns1:solidFill>
-            <ns1:schemeClr val="tx1"/>
-          </ns1:solidFill>
-          <ns1:latin typeface="Meiryo"/>
-          <ns1:ea typeface="Meiryo"/>
-          <ns1:cs typeface="Meiryo"/>
-        </ns1:defRPr>
-      </ns1:lvl3pPr>
-      <ns1:lvl4pPr marL="1371600" algn="l" defTabSz="914400" rtl="0" eaLnBrk="1" latinLnBrk="0" hangingPunct="1">
-        <ns1:defRPr sz="1800" kern="1200" lang="ja-JP">
-          <ns1:solidFill>
-            <ns1:schemeClr val="tx1"/>
-          </ns1:solidFill>
-          <ns1:latin typeface="Meiryo"/>
-          <ns1:ea typeface="Meiryo"/>
-          <ns1:cs typeface="Meiryo"/>
-        </ns1:defRPr>
-      </ns1:lvl4pPr>
-      <ns1:lvl5pPr marL="1828800" algn="l" defTabSz="914400" rtl="0" eaLnBrk="1" latinLnBrk="0" hangingPunct="1">
-        <ns1:defRPr sz="1800" kern="1200" lang="ja-JP">
-          <ns1:solidFill>
-            <ns1:schemeClr val="tx1"/>
-          </ns1:solidFill>
-          <ns1:latin typeface="Meiryo"/>
-          <ns1:ea typeface="Meiryo"/>
-          <ns1:cs typeface="Meiryo"/>
-        </ns1:defRPr>
-      </ns1:lvl5pPr>
-      <ns1:lvl6pPr marL="2286000" algn="l" defTabSz="914400" rtl="0" eaLnBrk="1" latinLnBrk="0" hangingPunct="1">
-        <ns1:defRPr sz="1800" kern="1200" lang="ja-JP">
-          <ns1:solidFill>
-            <ns1:schemeClr val="tx1"/>
-          </ns1:solidFill>
-          <ns1:latin typeface="Meiryo"/>
-          <ns1:ea typeface="Meiryo"/>
-          <ns1:cs typeface="Meiryo"/>
-        </ns1:defRPr>
-      </ns1:lvl6pPr>
-      <ns1:lvl7pPr marL="2743200" algn="l" defTabSz="914400" rtl="0" eaLnBrk="1" latinLnBrk="0" hangingPunct="1">
-        <ns1:defRPr sz="1800" kern="1200" lang="ja-JP">
-          <ns1:solidFill>
-            <ns1:schemeClr val="tx1"/>
-          </ns1:solidFill>
-          <ns1:latin typeface="Meiryo"/>
-          <ns1:ea typeface="Meiryo"/>
-          <ns1:cs typeface="Meiryo"/>
-        </ns1:defRPr>
-      </ns1:lvl7pPr>
-      <ns1:lvl8pPr marL="3200400" algn="l" defTabSz="914400" rtl="0" eaLnBrk="1" latinLnBrk="0" hangingPunct="1">
-        <ns1:defRPr sz="1800" kern="1200" lang="ja-JP">
-          <ns1:solidFill>
-            <ns1:schemeClr val="tx1"/>
-          </ns1:solidFill>
-          <ns1:latin typeface="Meiryo"/>
-          <ns1:ea typeface="Meiryo"/>
-          <ns1:cs typeface="Meiryo"/>
-        </ns1:defRPr>
-      </ns1:lvl8pPr>
-      <ns1:lvl9pPr marL="3657600" algn="l" defTabSz="914400" rtl="0" eaLnBrk="1" latinLnBrk="0" hangingPunct="1">
-        <ns1:defRPr sz="1800" kern="1200" lang="ja-JP">
-          <ns1:solidFill>
-            <ns1:schemeClr val="tx1"/>
-          </ns1:solidFill>
-          <ns1:latin typeface="Meiryo"/>
-          <ns1:ea typeface="Meiryo"/>
-          <ns1:cs typeface="Meiryo"/>
-        </ns1:defRPr>
-      </ns1:lvl9pPr>
-    </ns0:otherStyle>
-  </ns0:txStyles>
-</ns0:sldMaster>
+<p:sldMaster xmlns:a="http://schemas.openxmlformats.org/drawingml/2006/main" xmlns:ns3="http://schemas.microsoft.com/office/drawing/2014/main" xmlns:p="http://schemas.openxmlformats.org/presentationml/2006/main" xmlns:r="http://schemas.openxmlformats.org/officeDocument/2006/relationships">
+  <p:cSld>
+    <p:spTree>
+      <p:nvGrpSpPr>
+        <p:cNvPr id="1" name=""/>
+        <p:cNvGrpSpPr/>
+        <p:nvPr/>
+      </p:nvGrpSpPr>
+      <p:grpSpPr>
+        <a:xfrm>
+          <a:off x="0" y="0"/>
+          <a:ext cx="0" cy="0"/>
+          <a:chOff x="0" y="0"/>
+          <a:chExt cx="0" cy="0"/>
+        </a:xfrm>
+      </p:grpSpPr>
+      <p:pic>
+        <p:nvPicPr>
+          <p:cNvPr id="2" name=""/>
+          <p:cNvPicPr>
+            <a:picLocks noChangeAspect="1"/>
+          </p:cNvPicPr>
+          <p:nvPr/>
+        </p:nvPicPr>
+        <p:blipFill>
+          <a:blip r:embed="rIdPersonalAuthorLogo"/>
+          <a:stretch/>
+        </p:blipFill>
+        <p:spPr>
+          <a:xfrm>
+            <a:off x="685800" y="85748"/>
+            <a:ext cx="1714500" cy="210457"/>
+          </a:xfrm>
+          <a:prstGeom prst="rect">
+            <a:avLst/>
+          </a:prstGeom>
+        </p:spPr>
+      </p:pic>
+      <p:sp>
+        <p:nvSpPr>
+          <p:cNvPr id="3" name="Personal author website">
+            <a:extLst>
+              <a:ext uri="{FF2B5EF4-FFF2-40B4-BE49-F238E27FC236}">
+                <ns3:creationId id="{2B199CB2-0940-4D13-9CAC-E3F074FAA0ED}"/>
+              </a:ext>
+            </a:extLst>
+          </p:cNvPr>
+          <p:cNvSpPr>
+            <a:spLocks noGrp="1"/>
+          </p:cNvSpPr>
+          <p:nvPr/>
+        </p:nvSpPr>
+        <p:spPr>
+          <a:xfrm>
+            <a:off x="6286500" y="6477000"/>
+            <a:ext cx="4000500" cy="266700"/>
+          </a:xfrm>
+          <a:prstGeom prst="rect">
+            <a:avLst/>
+          </a:prstGeom>
+          <a:noFill/>
+          <a:ln w="0">
+            <a:noFill/>
+          </a:ln>
+        </p:spPr>
+        <p:txBody>
+          <a:bodyPr>
+            <a:noAutofit/>
+          </a:bodyPr>
+          <a:lstStyle/>
+          <a:p>
+            <a:pPr>
+              <a:defRPr sz="1800">
+                <a:solidFill>
+                  <a:srgbClr val="607482"/>
+                </a:solidFill>
+                <a:latin typeface="Meiryo"/>
+                <a:ea typeface="Meiryo"/>
+                <a:cs typeface="Meiryo"/>
+              </a:defRPr>
+            </a:pPr>
+            <a:r>
+              <a:rPr sz="1800">
+                <a:solidFill>
+                  <a:srgbClr val="607482"/>
+                </a:solidFill>
+                <a:latin typeface="Meiryo"/>
+                <a:ea typeface="Meiryo"/>
+                <a:cs typeface="Meiryo"/>
+              </a:rPr>
+              <a:t>tsuchiyatakahiro.com</a:t>
+            </a:r>
+          </a:p>
+        </p:txBody>
+      </p:sp>
+    </p:spTree>
+  </p:cSld>
+  <p:clrMap bg1="lt1" tx1="dk1" bg2="lt2" tx2="dk2" accent1="accent1" accent2="accent2" accent3="accent3" accent4="accent4" accent5="accent5" accent6="accent6" hlink="hlink" folHlink="folHlink"/>
+  <p:sldLayoutIdLst>
+    <p:sldLayoutId id="2147483649" r:id="rId1"/>
+  </p:sldLayoutIdLst>
+  <p:hf sldNum="0" hdr="0" ftr="0" dt="0"/>
+  <p:txStyles>
+    <p:titleStyle>
+      <a:lvl1pPr algn="ctr" defTabSz="914400" rtl="0" eaLnBrk="1" latinLnBrk="0" hangingPunct="1">
+        <a:spcBef>
+          <a:spcPct val="0"/>
+        </a:spcBef>
+        <a:buNone/>
+        <a:defRPr sz="4400" kern="1200" lang="ja-JP">
+          <a:solidFill>
+            <a:schemeClr val="tx1"/>
+          </a:solidFill>
+          <a:latin typeface="Meiryo"/>
+          <a:ea typeface="Meiryo"/>
+          <a:cs typeface="Meiryo"/>
+        </a:defRPr>
+      </a:lvl1pPr>
+    </p:titleStyle>
+    <p:bodyStyle>
+      <a:lvl1pPr marL="342900" indent="-342900" algn="l" defTabSz="914400" rtl="0" eaLnBrk="1" latinLnBrk="0" hangingPunct="1">
+        <a:spcBef>
+          <a:spcPct val="20000"/>
+        </a:spcBef>
+        <a:buFont typeface="Meiryo" pitchFamily="34" charset="0"/>
+        <a:buChar char="•"/>
+        <a:defRPr sz="3200" kern="1200" lang="ja-JP">
+          <a:solidFill>
+            <a:schemeClr val="tx1"/>
+          </a:solidFill>
+          <a:latin typeface="Meiryo"/>
+          <a:ea typeface="Meiryo"/>
+          <a:cs typeface="Meiryo"/>
+        </a:defRPr>
+      </a:lvl1pPr>
+      <a:lvl2pPr marL="742950" indent="-285750" algn="l" defTabSz="914400" rtl="0" eaLnBrk="1" latinLnBrk="0" hangingPunct="1">
+        <a:spcBef>
+          <a:spcPct val="20000"/>
+        </a:spcBef>
+        <a:buFont typeface="Meiryo" pitchFamily="34" charset="0"/>
+        <a:buChar char="–"/>
+        <a:defRPr sz="2800" kern="1200" lang="ja-JP">
+          <a:solidFill>
+            <a:schemeClr val="tx1"/>
+          </a:solidFill>
+          <a:latin typeface="Meiryo"/>
+          <a:ea typeface="Meiryo"/>
+          <a:cs typeface="Meiryo"/>
+        </a:defRPr>
+      </a:lvl2pPr>
+      <a:lvl3pPr marL="1143000" indent="-228600" algn="l" defTabSz="914400" rtl="0" eaLnBrk="1" latinLnBrk="0" hangingPunct="1">
+        <a:spcBef>
+          <a:spcPct val="20000"/>
+        </a:spcBef>
+        <a:buFont typeface="Meiryo" pitchFamily="34" charset="0"/>
+        <a:buChar char="•"/>
+        <a:defRPr sz="2400" kern="1200" lang="ja-JP">
+          <a:solidFill>
+            <a:schemeClr val="tx1"/>
+          </a:solidFill>
+          <a:latin typeface="Meiryo"/>
+          <a:ea typeface="Meiryo"/>
+          <a:cs typeface="Meiryo"/>
+        </a:defRPr>
+      </a:lvl3pPr>
+      <a:lvl4pPr marL="1600200" indent="-228600" algn="l" defTabSz="914400" rtl="0" eaLnBrk="1" latinLnBrk="0" hangingPunct="1">
+        <a:spcBef>
+          <a:spcPct val="20000"/>
+        </a:spcBef>
+        <a:buFont typeface="Meiryo" pitchFamily="34" charset="0"/>
+        <a:buChar char="–"/>
+        <a:defRPr sz="2000" kern="1200" lang="ja-JP">
+          <a:solidFill>
+            <a:schemeClr val="tx1"/>
+          </a:solidFill>
+          <a:latin typeface="Meiryo"/>
+          <a:ea typeface="Meiryo"/>
+          <a:cs typeface="Meiryo"/>
+        </a:defRPr>
+      </a:lvl4pPr>
+      <a:lvl5pPr marL="2057400" indent="-228600" algn="l" defTabSz="914400" rtl="0" eaLnBrk="1" latinLnBrk="0" hangingPunct="1">
+        <a:spcBef>
+          <a:spcPct val="20000"/>
+        </a:spcBef>
+        <a:buFont typeface="Meiryo" pitchFamily="34" charset="0"/>
+        <a:buChar char="»"/>
+        <a:defRPr sz="2000" kern="1200" lang="ja-JP">
+          <a:solidFill>
+            <a:schemeClr val="tx1"/>
+          </a:solidFill>
+          <a:latin typeface="Meiryo"/>
+          <a:ea typeface="Meiryo"/>
+          <a:cs typeface="Meiryo"/>
+        </a:defRPr>
+      </a:lvl5pPr>
+      <a:lvl6pPr marL="2514600" indent="-228600" algn="l" defTabSz="914400" rtl="0" eaLnBrk="1" latinLnBrk="0" hangingPunct="1">
+        <a:spcBef>
+          <a:spcPct val="20000"/>
+        </a:spcBef>
+        <a:buFont typeface="Meiryo" pitchFamily="34" charset="0"/>
+        <a:buChar char="•"/>
+        <a:defRPr sz="2000" kern="1200" lang="ja-JP">
+          <a:solidFill>
+            <a:schemeClr val="tx1"/>
+          </a:solidFill>
+          <a:latin typeface="Meiryo"/>
+          <a:ea typeface="Meiryo"/>
+          <a:cs typeface="Meiryo"/>
+        </a:defRPr>
+      </a:lvl6pPr>
+      <a:lvl7pPr marL="2971800" indent="-228600" algn="l" defTabSz="914400" rtl="0" eaLnBrk="1" latinLnBrk="0" hangingPunct="1">
+        <a:spcBef>
+          <a:spcPct val="20000"/>
+        </a:spcBef>
+        <a:buFont typeface="Meiryo" pitchFamily="34" charset="0"/>
+        <a:buChar char="•"/>
+        <a:defRPr sz="2000" kern="1200" lang="ja-JP">
+          <a:solidFill>
+            <a:schemeClr val="tx1"/>
+          </a:solidFill>
+          <a:latin typeface="Meiryo"/>
+          <a:ea typeface="Meiryo"/>
+          <a:cs typeface="Meiryo"/>
+        </a:defRPr>
+      </a:lvl7pPr>
+      <a:lvl8pPr marL="3429000" indent="-228600" algn="l" defTabSz="914400" rtl="0" eaLnBrk="1" latinLnBrk="0" hangingPunct="1">
+        <a:spcBef>
+          <a:spcPct val="20000"/>
+        </a:spcBef>
+        <a:buFont typeface="Meiryo" pitchFamily="34" charset="0"/>
+        <a:buChar char="•"/>
+        <a:defRPr sz="2000" kern="1200" lang="ja-JP">
+          <a:solidFill>
+            <a:schemeClr val="tx1"/>
+          </a:solidFill>
+          <a:latin typeface="Meiryo"/>
+          <a:ea typeface="Meiryo"/>
+          <a:cs typeface="Meiryo"/>
+        </a:defRPr>
+      </a:lvl8pPr>
+      <a:lvl9pPr marL="3886200" indent="-228600" algn="l" defTabSz="914400" rtl="0" eaLnBrk="1" latinLnBrk="0" hangingPunct="1">
+        <a:spcBef>
+          <a:spcPct val="20000"/>
+        </a:spcBef>
+        <a:buFont typeface="Meiryo" pitchFamily="34" charset="0"/>
+        <a:buChar char="•"/>
+        <a:defRPr sz="2000" kern="1200" lang="ja-JP">
+          <a:solidFill>
+            <a:schemeClr val="tx1"/>
+          </a:solidFill>
+          <a:latin typeface="Meiryo"/>
+          <a:ea typeface="Meiryo"/>
+          <a:cs typeface="Meiryo"/>
+        </a:defRPr>
+      </a:lvl9pPr>
+    </p:bodyStyle>
+    <p:otherStyle>
+      <a:defPPr>
+        <a:defRPr lang="ja-JP">
+          <a:latin typeface="Meiryo"/>
+          <a:ea typeface="Meiryo"/>
+          <a:cs typeface="Meiryo"/>
+        </a:defRPr>
+      </a:defPPr>
+      <a:lvl1pPr marL="0" algn="l" defTabSz="914400" rtl="0" eaLnBrk="1" latinLnBrk="0" hangingPunct="1">
+        <a:defRPr sz="1800" kern="1200" lang="ja-JP">
+          <a:solidFill>
+            <a:schemeClr val="tx1"/>
+          </a:solidFill>
+          <a:latin typeface="Meiryo"/>
+          <a:ea typeface="Meiryo"/>
+          <a:cs typeface="Meiryo"/>
+        </a:defRPr>
+      </a:lvl1pPr>
+      <a:lvl2pPr marL="457200" algn="l" defTabSz="914400" rtl="0" eaLnBrk="1" latinLnBrk="0" hangingPunct="1">
+        <a:defRPr sz="1800" kern="1200" lang="ja-JP">
+          <a:solidFill>
+            <a:schemeClr val="tx1"/>
+          </a:solidFill>
+          <a:latin typeface="Meiryo"/>
+          <a:ea typeface="Meiryo"/>
+          <a:cs typeface="Meiryo"/>
+        </a:defRPr>
+      </a:lvl2pPr>
+      <a:lvl3pPr marL="914400" algn="l" defTabSz="914400" rtl="0" eaLnBrk="1" latinLnBrk="0" hangingPunct="1">
+        <a:defRPr sz="1800" kern="1200" lang="ja-JP">
+          <a:solidFill>
+            <a:schemeClr val="tx1"/>
+          </a:solidFill>
+          <a:latin typeface="Meiryo"/>
+          <a:ea typeface="Meiryo"/>
+          <a:cs typeface="Meiryo"/>
+        </a:defRPr>
+      </a:lvl3pPr>
+      <a:lvl4pPr marL="1371600" algn="l" defTabSz="914400" rtl="0" eaLnBrk="1" latinLnBrk="0" hangingPunct="1">
+        <a:defRPr sz="1800" kern="1200" lang="ja-JP">
+          <a:solidFill>
+            <a:schemeClr val="tx1"/>
+          </a:solidFill>
+          <a:latin typeface="Meiryo"/>
+          <a:ea typeface="Meiryo"/>
+          <a:cs typeface="Meiryo"/>
+        </a:defRPr>
+      </a:lvl4pPr>
+      <a:lvl5pPr marL="1828800" algn="l" defTabSz="914400" rtl="0" eaLnBrk="1" latinLnBrk="0" hangingPunct="1">
+        <a:defRPr sz="1800" kern="1200" lang="ja-JP">
+          <a:solidFill>
+            <a:schemeClr val="tx1"/>
+          </a:solidFill>
+          <a:latin typeface="Meiryo"/>
+          <a:ea typeface="Meiryo"/>
+          <a:cs typeface="Meiryo"/>
+        </a:defRPr>
+      </a:lvl5pPr>
+      <a:lvl6pPr marL="2286000" algn="l" defTabSz="914400" rtl="0" eaLnBrk="1" latinLnBrk="0" hangingPunct="1">
+        <a:defRPr sz="1800" kern="1200" lang="ja-JP">
+          <a:solidFill>
+            <a:schemeClr val="tx1"/>
+          </a:solidFill>
+          <a:latin typeface="Meiryo"/>
+          <a:ea typeface="Meiryo"/>
+          <a:cs typeface="Meiryo"/>
+        </a:defRPr>
+      </a:lvl6pPr>
+      <a:lvl7pPr marL="2743200" algn="l" defTabSz="914400" rtl="0" eaLnBrk="1" latinLnBrk="0" hangingPunct="1">
+        <a:defRPr sz="1800" kern="1200" lang="ja-JP">
+          <a:solidFill>
+            <a:schemeClr val="tx1"/>
+          </a:solidFill>
+          <a:latin typeface="Meiryo"/>
+          <a:ea typeface="Meiryo"/>
+          <a:cs typeface="Meiryo"/>
+        </a:defRPr>
+      </a:lvl7pPr>
+      <a:lvl8pPr marL="3200400" algn="l" defTabSz="914400" rtl="0" eaLnBrk="1" latinLnBrk="0" hangingPunct="1">
+        <a:defRPr sz="1800" kern="1200" lang="ja-JP">
+          <a:solidFill>
+            <a:schemeClr val="tx1"/>
+          </a:solidFill>
+          <a:latin typeface="Meiryo"/>
+          <a:ea typeface="Meiryo"/>
+          <a:cs typeface="Meiryo"/>
+        </a:defRPr>
+      </a:lvl8pPr>
+      <a:lvl9pPr marL="3657600" algn="l" defTabSz="914400" rtl="0" eaLnBrk="1" latinLnBrk="0" hangingPunct="1">
+        <a:defRPr sz="1800" kern="1200" lang="ja-JP">
+          <a:solidFill>
+            <a:schemeClr val="tx1"/>
+          </a:solidFill>
+          <a:latin typeface="Meiryo"/>
+          <a:ea typeface="Meiryo"/>
+          <a:cs typeface="Meiryo"/>
+        </a:defRPr>
+      </a:lvl9pPr>
+    </p:otherStyle>
+  </p:txStyles>
+</p:sldMaster>
 </file>
 
 <file path=ppt/slides/slide1.xml><?xml version="1.0" encoding="utf-8"?>
-<ns0:sld xmlns:ns0="http://schemas.openxmlformats.org/presentationml/2006/main" xmlns:ns1="http://schemas.openxmlformats.org/drawingml/2006/main" xmlns:ns2="http://schemas.openxmlformats.org/officeDocument/2006/relationships">
-  <ns0:cSld name="Slide 1">
-    <ns0:bg>
-      <ns0:bgPr>
-        <ns1:solidFill>
-          <ns1:srgbClr val="FFFFFF"/>
-        </ns1:solidFill>
-      </ns0:bgPr>
-    </ns0:bg>
-    <ns0:spTree>
-      <ns0:nvGrpSpPr>
-        <ns0:cNvPr id="1" name=""/>
-        <ns0:cNvGrpSpPr/>
-        <ns0:nvPr/>
-      </ns0:nvGrpSpPr>
-      <ns0:grpSpPr>
-        <ns1:xfrm>
-          <ns1:off x="0" y="0"/>
-          <ns1:ext cx="0" cy="0"/>
-          <ns1:chOff x="0" y="0"/>
-          <ns1:chExt cx="0" cy="0"/>
-        </ns1:xfrm>
-      </ns0:grpSpPr>
-      <ns0:sp>
-        <ns0:nvSpPr>
-          <ns0:cNvPr id="2" name="Shape 0"/>
-          <ns0:cNvSpPr/>
-          <ns0:nvPr/>
-        </ns0:nvSpPr>
-        <ns0:spPr>
-          <ns1:xfrm>
-            <ns1:off x="0" y="0"/>
-            <ns1:ext cx="12191695" cy="6858000"/>
-          </ns1:xfrm>
-          <ns1:prstGeom prst="rect">
-            <ns1:avLst/>
-          </ns1:prstGeom>
-          <ns1:solidFill>
-            <ns1:srgbClr val="132B39"/>
-          </ns1:solidFill>
-          <ns1:ln w="12700">
-            <ns1:solidFill>
-              <ns1:srgbClr val="132B39"/>
-            </ns1:solidFill>
-            <ns1:prstDash val="solid"/>
-          </ns1:ln>
-        </ns0:spPr>
-      </ns0:sp>
-      <ns0:sp>
-        <ns0:nvSpPr>
-          <ns0:cNvPr id="3" name="Shape 1"/>
-          <ns0:cNvSpPr/>
-          <ns0:nvPr/>
-        </ns0:nvSpPr>
-        <ns0:spPr>
-          <ns1:xfrm>
-            <ns1:off x="0" y="0"/>
-            <ns1:ext cx="182880" cy="6858000"/>
-          </ns1:xfrm>
-          <ns1:prstGeom prst="rect">
-            <ns1:avLst/>
-          </ns1:prstGeom>
-          <ns1:solidFill>
-            <ns1:srgbClr val="007F82"/>
-          </ns1:solidFill>
-          <ns1:ln w="12700">
-            <ns1:solidFill>
-              <ns1:srgbClr val="007F82"/>
-            </ns1:solidFill>
-            <ns1:prstDash val="solid"/>
-          </ns1:ln>
-        </ns0:spPr>
-      </ns0:sp>
-      <ns0:sp>
-        <ns0:nvSpPr>
-          <ns0:cNvPr id="4" name="Text 2"/>
-          <ns0:cNvSpPr txBox="1"/>
-          <ns0:nvPr/>
-        </ns0:nvSpPr>
-        <ns0:spPr>
-          <ns1:xfrm>
-            <ns1:off x="713232" y="557784"/>
-            <ns1:ext cx="5486400" cy="502920"/>
-          </ns1:xfrm>
-          <ns1:prstGeom prst="rect">
-            <ns1:avLst/>
-          </ns1:prstGeom>
-          <ns1:noFill/>
-          <ns1:ln/>
-        </ns0:spPr>
-        <ns0:txBody>
-          <ns1:bodyPr wrap="square" lIns="0" tIns="0" rIns="0" bIns="0" rtlCol="0" anchor="t"/>
-          <ns1:lstStyle/>
-          <ns1:p>
-            <ns1:pPr indent="0" marL="0">
-              <ns1:lnSpc>
-                <ns1:spcPct val="106000"/>
-              </ns1:lnSpc>
-              <ns1:buNone/>
-            </ns1:pPr>
-            <ns1:r>
-              <ns1:rPr lang="ja-JP" altLang="en-US" sz="2600" dirty="0">
-                <ns1:solidFill>
-                  <ns1:srgbClr val="B1D6D5"/>
-                </ns1:solidFill>
-                <ns1:latin typeface="Meiryo" pitchFamily="34" charset="0"/>
-                <ns1:ea typeface="Meiryo" pitchFamily="34" charset="-122"/>
-                <ns1:cs typeface="Meiryo" pitchFamily="34" charset="-120"/>
-              </ns1:rPr>
-              <ns1:t>第03回</ns1:t>
-            </ns1:r>
-            <ns1:endParaRPr lang="ja-JP" sz="2600" dirty="0">
-              <ns1:latin typeface="Meiryo"/>
-              <ns1:ea typeface="Meiryo"/>
-              <ns1:cs typeface="Meiryo"/>
-            </ns1:endParaRPr>
-          </ns1:p>
-        </ns0:txBody>
-      </ns0:sp>
-      <ns0:sp>
-        <ns0:nvSpPr>
-          <ns0:cNvPr id="5" name="Text 3"/>
-          <ns0:cNvSpPr txBox="1"/>
-          <ns0:nvPr/>
-        </ns0:nvSpPr>
-        <ns0:spPr>
-          <ns1:xfrm>
-            <ns1:off x="713232" y="1554480"/>
-            <ns1:ext cx="9418320" cy="2240280"/>
-          </ns1:xfrm>
-          <ns1:prstGeom prst="rect">
-            <ns1:avLst/>
-          </ns1:prstGeom>
-          <ns1:noFill/>
-          <ns1:ln/>
-        </ns0:spPr>
-        <ns0:txBody>
-          <ns1:bodyPr wrap="square" lIns="0" tIns="0" rIns="0" bIns="0" rtlCol="0" anchor="t"/>
-          <ns1:lstStyle/>
-          <ns1:p>
-            <ns1:pPr indent="0" marL="0">
-              <ns1:lnSpc>
-                <ns1:spcPct val="106000"/>
-              </ns1:lnSpc>
-              <ns1:buNone/>
-            </ns1:pPr>
-            <ns1:r>
-              <ns1:rPr lang="ja-JP" altLang="en-US" sz="4200" b="1" dirty="0">
-                <ns1:solidFill>
-                  <ns1:srgbClr val="FFFFFF"/>
-                </ns1:solidFill>
-                <ns1:latin typeface="Meiryo" pitchFamily="34" charset="0"/>
-                <ns1:ea typeface="Meiryo" pitchFamily="34" charset="-122"/>
-                <ns1:cs typeface="Meiryo" pitchFamily="34" charset="-120"/>
-              </ns1:rPr>
-              <ns1:t>どこを変えたか、</ns1:t>
-            </ns1:r>
-            <ns1:endParaRPr lang="ja-JP" sz="4200" dirty="0">
-              <ns1:latin typeface="Meiryo"/>
-              <ns1:ea typeface="Meiryo"/>
-              <ns1:cs typeface="Meiryo"/>
-            </ns1:endParaRPr>
-          </ns1:p>
-          <ns1:p>
-            <ns1:pPr indent="0" marL="0">
-              <ns1:lnSpc>
-                <ns1:spcPct val="106000"/>
-              </ns1:lnSpc>
-              <ns1:buNone/>
-            </ns1:pPr>
-            <ns1:r>
-              <ns1:rPr lang="ja-JP" altLang="en-US" sz="4200" b="1" dirty="0">
-                <ns1:solidFill>
-                  <ns1:srgbClr val="FFFFFF"/>
-                </ns1:solidFill>
-                <ns1:latin typeface="Meiryo" pitchFamily="34" charset="0"/>
-                <ns1:ea typeface="Meiryo" pitchFamily="34" charset="-122"/>
-                <ns1:cs typeface="Meiryo" pitchFamily="34" charset="-120"/>
-              </ns1:rPr>
-              <ns1:t>説明できますか？</ns1:t>
-            </ns1:r>
-            <ns1:endParaRPr lang="ja-JP" sz="4200" dirty="0">
-              <ns1:latin typeface="Meiryo"/>
-              <ns1:ea typeface="Meiryo"/>
-              <ns1:cs typeface="Meiryo"/>
-            </ns1:endParaRPr>
-          </ns1:p>
-        </ns0:txBody>
-      </ns0:sp>
-      <ns0:sp>
-        <ns0:nvSpPr>
-          <ns0:cNvPr id="6" name="Text 4"/>
-          <ns0:cNvSpPr txBox="1"/>
-          <ns0:nvPr/>
-        </ns0:nvSpPr>
-        <ns0:spPr>
-          <ns1:xfrm>
-            <ns1:off x="749808" y="4169664"/>
-            <ns1:ext cx="9692640" cy="1188720"/>
-          </ns1:xfrm>
-          <ns1:prstGeom prst="rect">
-            <ns1:avLst/>
-          </ns1:prstGeom>
-          <ns1:noFill/>
-          <ns1:ln/>
-        </ns0:spPr>
-        <ns0:txBody>
-          <ns1:bodyPr wrap="square" lIns="0" tIns="0" rIns="0" bIns="0" rtlCol="0" anchor="t"/>
-          <ns1:lstStyle/>
-          <ns1:p>
-            <ns1:pPr indent="0" marL="0">
-              <ns1:lnSpc>
-                <ns1:spcPct val="106000"/>
-              </ns1:lnSpc>
-              <ns1:buNone/>
-            </ns1:pPr>
-            <ns1:r>
-              <ns1:rPr lang="ja-JP" altLang="en-US" sz="2600" dirty="0">
-                <ns1:solidFill>
-                  <ns1:srgbClr val="D9E7EC"/>
-                </ns1:solidFill>
-                <ns1:latin typeface="Meiryo" pitchFamily="34" charset="0"/>
-                <ns1:ea typeface="Meiryo" pitchFamily="34" charset="-122"/>
-                <ns1:cs typeface="Meiryo" pitchFamily="34" charset="-120"/>
-              </ns1:rPr>
-              <ns1:t>第3回｜編集・差分・commitを体験し、</ns1:t>
-            </ns1:r>
-            <ns1:endParaRPr lang="ja-JP" sz="2600" dirty="0">
-              <ns1:latin typeface="Meiryo"/>
-              <ns1:ea typeface="Meiryo"/>
-              <ns1:cs typeface="Meiryo"/>
-            </ns1:endParaRPr>
-          </ns1:p>
-          <ns1:p>
-            <ns1:pPr indent="0" marL="0">
-              <ns1:lnSpc>
-                <ns1:spcPct val="106000"/>
-              </ns1:lnSpc>
-              <ns1:buNone/>
-            </ns1:pPr>
-            <ns1:r>
-              <ns1:rPr lang="ja-JP" altLang="en-US" sz="2600" dirty="0">
-                <ns1:solidFill>
-                  <ns1:srgbClr val="D9E7EC"/>
-                </ns1:solidFill>
-                <ns1:latin typeface="Meiryo" pitchFamily="34" charset="0"/>
-                <ns1:ea typeface="Meiryo" pitchFamily="34" charset="-122"/>
-                <ns1:cs typeface="Meiryo" pitchFamily="34" charset="-120"/>
-              </ns1:rPr>
-              <ns1:t>提出する版を確かめます。</ns1:t>
-            </ns1:r>
-            <ns1:endParaRPr lang="ja-JP" sz="2600" dirty="0">
-              <ns1:latin typeface="Meiryo"/>
-              <ns1:ea typeface="Meiryo"/>
-              <ns1:cs typeface="Meiryo"/>
-            </ns1:endParaRPr>
-          </ns1:p>
-        </ns0:txBody>
-      </ns0:sp>
-      <ns0:pic>
-        <ns0:nvPicPr>
-          <ns0:cNvPr id="7" name="Image 0" descr="Lucide git-commit-horizontal">    </ns0:cNvPr>
-          <ns0:cNvPicPr>
-            <ns1:picLocks noChangeAspect="1"/>
-          </ns0:cNvPicPr>
-          <ns0:nvPr/>
-        </ns0:nvPicPr>
-        <ns0:blipFill>
-          <ns1:blip ns2:embed="rId1"/>
-          <ns1:stretch>
-            <ns1:fillRect/>
-          </ns1:stretch>
-        </ns0:blipFill>
-        <ns0:spPr>
-          <ns1:xfrm>
-            <ns1:off x="10497312" y="566928"/>
-            <ns1:ext cx="841248" cy="841248"/>
-          </ns1:xfrm>
-          <ns1:prstGeom prst="rect">
-            <ns1:avLst/>
-          </ns1:prstGeom>
-        </ns0:spPr>
-      </ns0:pic>
-      <ns0:sp>
-        <ns0:nvSpPr>
-          <ns0:cNvPr id="8" name="Text 5"/>
-          <ns0:cNvSpPr txBox="1"/>
-          <ns0:nvPr/>
-        </ns0:nvSpPr>
-        <ns0:spPr>
-          <ns1:xfrm>
-            <ns1:off x="749808" y="6281928"/>
-            <ns1:ext cx="9144000" cy="338328"/>
-          </ns1:xfrm>
-          <ns1:prstGeom prst="rect">
-            <ns1:avLst/>
-          </ns1:prstGeom>
-          <ns1:noFill/>
-          <ns1:ln/>
-        </ns0:spPr>
-        <ns0:txBody>
-          <ns1:bodyPr wrap="square" lIns="0" tIns="0" rIns="0" bIns="0" rtlCol="0" anchor="t"/>
-          <ns1:lstStyle/>
-          <ns1:p>
-            <ns1:pPr indent="0" marL="0">
-              <ns1:lnSpc>
-                <ns1:spcPct val="106000"/>
-              </ns1:lnSpc>
-              <ns1:buNone/>
-            </ns1:pPr>
-            <ns1:r>
-              <ns1:rPr lang="ja-JP" altLang="en-US" sz="1800" dirty="0">
-                <ns1:solidFill>
-                  <ns1:srgbClr val="D9E7EC"/>
-                </ns1:solidFill>
-                <ns1:latin typeface="Meiryo" pitchFamily="34" charset="0"/>
-                <ns1:ea typeface="Meiryo" pitchFamily="34" charset="-122"/>
-                <ns1:cs typeface="Meiryo" pitchFamily="34" charset="-120"/>
-              </ns1:rPr>
-              <ns1:t>大学生のためのAI・データリテラシー</ns1:t>
-            </ns1:r>
-            <ns1:endParaRPr lang="ja-JP" sz="1800" dirty="0">
-              <ns1:latin typeface="Meiryo"/>
-              <ns1:ea typeface="Meiryo"/>
-              <ns1:cs typeface="Meiryo"/>
-            </ns1:endParaRPr>
-          </ns1:p>
-        </ns0:txBody>
-      </ns0:sp>
-    </ns0:spTree>
-  </ns0:cSld>
-  <ns0:clrMapOvr>
-    <ns1:masterClrMapping/>
-  </ns0:clrMapOvr>
-</ns0:sld>
+<p:sld xmlns:a="http://schemas.openxmlformats.org/drawingml/2006/main" xmlns:ns3="http://schemas.microsoft.com/office/drawing/2014/main" xmlns:p="http://schemas.openxmlformats.org/presentationml/2006/main" xmlns:r="http://schemas.openxmlformats.org/officeDocument/2006/relationships">
+  <p:cSld name="Slide 1">
+    <p:bg>
+      <p:bgPr>
+        <a:solidFill>
+          <a:srgbClr val="FFFFFF"/>
+        </a:solidFill>
+      </p:bgPr>
+    </p:bg>
+    <p:spTree>
+      <p:nvGrpSpPr>
+        <p:cNvPr id="1" name=""/>
+        <p:cNvGrpSpPr/>
+        <p:nvPr/>
+      </p:nvGrpSpPr>
+      <p:grpSpPr>
+        <a:xfrm>
+          <a:off x="0" y="0"/>
+          <a:ext cx="0" cy="0"/>
+          <a:chOff x="0" y="0"/>
+          <a:chExt cx="0" cy="0"/>
+        </a:xfrm>
+      </p:grpSpPr>
+      <p:sp>
+        <p:nvSpPr>
+          <p:cNvPr id="2" name="Shape 0"/>
+          <p:cNvSpPr/>
+          <p:nvPr/>
+        </p:nvSpPr>
+        <p:spPr>
+          <a:xfrm>
+            <a:off x="0" y="0"/>
+            <a:ext cx="12191695" cy="6858000"/>
+          </a:xfrm>
+          <a:prstGeom prst="rect">
+            <a:avLst/>
+          </a:prstGeom>
+          <a:solidFill>
+            <a:srgbClr val="132B39"/>
+          </a:solidFill>
+          <a:ln w="12700">
+            <a:solidFill>
+              <a:srgbClr val="132B39"/>
+            </a:solidFill>
+            <a:prstDash val="solid"/>
+          </a:ln>
+        </p:spPr>
+      </p:sp>
+      <p:sp>
+        <p:nvSpPr>
+          <p:cNvPr id="3" name="Shape 1"/>
+          <p:cNvSpPr/>
+          <p:nvPr/>
+        </p:nvSpPr>
+        <p:spPr>
+          <a:xfrm>
+            <a:off x="0" y="0"/>
+            <a:ext cx="182880" cy="6858000"/>
+          </a:xfrm>
+          <a:prstGeom prst="rect">
+            <a:avLst/>
+          </a:prstGeom>
+          <a:solidFill>
+            <a:srgbClr val="007F82"/>
+          </a:solidFill>
+          <a:ln w="12700">
+            <a:solidFill>
+              <a:srgbClr val="007F82"/>
+            </a:solidFill>
+            <a:prstDash val="solid"/>
+          </a:ln>
+        </p:spPr>
+      </p:sp>
+      <p:sp>
+        <p:nvSpPr>
+          <p:cNvPr id="4" name="Text 2"/>
+          <p:cNvSpPr txBox="1"/>
+          <p:nvPr/>
+        </p:nvSpPr>
+        <p:spPr>
+          <a:xfrm>
+            <a:off x="713232" y="557784"/>
+            <a:ext cx="5486400" cy="502920"/>
+          </a:xfrm>
+          <a:prstGeom prst="rect">
+            <a:avLst/>
+          </a:prstGeom>
+          <a:noFill/>
+          <a:ln/>
+        </p:spPr>
+        <p:txBody>
+          <a:bodyPr wrap="square" lIns="0" tIns="0" rIns="0" bIns="0" rtlCol="0" anchor="t"/>
+          <a:lstStyle/>
+          <a:p>
+            <a:pPr indent="0" marL="0">
+              <a:lnSpc>
+                <a:spcPct val="106000"/>
+              </a:lnSpc>
+              <a:buNone/>
+            </a:pPr>
+            <a:r>
+              <a:rPr lang="ja-JP" altLang="en-US" sz="2600" dirty="0">
+                <a:solidFill>
+                  <a:srgbClr val="B1D6D5"/>
+                </a:solidFill>
+                <a:latin typeface="Meiryo" pitchFamily="34" charset="0"/>
+                <a:ea typeface="Meiryo" pitchFamily="34" charset="-122"/>
+                <a:cs typeface="Meiryo" pitchFamily="34" charset="-120"/>
+              </a:rPr>
+              <a:t>第03回</a:t>
+            </a:r>
+            <a:endParaRPr lang="ja-JP" sz="2600" dirty="0">
+              <a:latin typeface="Meiryo"/>
+              <a:ea typeface="Meiryo"/>
+              <a:cs typeface="Meiryo"/>
+            </a:endParaRPr>
+          </a:p>
+        </p:txBody>
+      </p:sp>
+      <p:sp>
+        <p:nvSpPr>
+          <p:cNvPr id="5" name="Text 3"/>
+          <p:cNvSpPr txBox="1"/>
+          <p:nvPr/>
+        </p:nvSpPr>
+        <p:spPr>
+          <a:xfrm>
+            <a:off x="713232" y="1554480"/>
+            <a:ext cx="9418320" cy="2240280"/>
+          </a:xfrm>
+          <a:prstGeom prst="rect">
+            <a:avLst/>
+          </a:prstGeom>
+          <a:noFill/>
+          <a:ln/>
+        </p:spPr>
+        <p:txBody>
+          <a:bodyPr wrap="square" lIns="0" tIns="0" rIns="0" bIns="0" rtlCol="0" anchor="t"/>
+          <a:lstStyle/>
+          <a:p>
+            <a:pPr indent="0" marL="0">
+              <a:lnSpc>
+                <a:spcPct val="106000"/>
+              </a:lnSpc>
+              <a:buNone/>
+            </a:pPr>
+            <a:r>
+              <a:rPr lang="ja-JP" altLang="en-US" sz="4200" b="1" dirty="0">
+                <a:solidFill>
+                  <a:srgbClr val="FFFFFF"/>
+                </a:solidFill>
+                <a:latin typeface="Meiryo" pitchFamily="34" charset="0"/>
+                <a:ea typeface="Meiryo" pitchFamily="34" charset="-122"/>
+                <a:cs typeface="Meiryo" pitchFamily="34" charset="-120"/>
+              </a:rPr>
+              <a:t>どこを変えたか、</a:t>
+            </a:r>
+            <a:endParaRPr lang="ja-JP" sz="4200" dirty="0">
+              <a:latin typeface="Meiryo"/>
+              <a:ea typeface="Meiryo"/>
+              <a:cs typeface="Meiryo"/>
+            </a:endParaRPr>
+          </a:p>
+          <a:p>
+            <a:pPr indent="0" marL="0">
+              <a:lnSpc>
+                <a:spcPct val="106000"/>
+              </a:lnSpc>
+              <a:buNone/>
+            </a:pPr>
+            <a:r>
+              <a:rPr lang="ja-JP" altLang="en-US" sz="4200" b="1" dirty="0">
+                <a:solidFill>
+                  <a:srgbClr val="FFFFFF"/>
+                </a:solidFill>
+                <a:latin typeface="Meiryo" pitchFamily="34" charset="0"/>
+                <a:ea typeface="Meiryo" pitchFamily="34" charset="-122"/>
+                <a:cs typeface="Meiryo" pitchFamily="34" charset="-120"/>
+              </a:rPr>
+              <a:t>説明できますか？</a:t>
+            </a:r>
+            <a:endParaRPr lang="ja-JP" sz="4200" dirty="0">
+              <a:latin typeface="Meiryo"/>
+              <a:ea typeface="Meiryo"/>
+              <a:cs typeface="Meiryo"/>
+            </a:endParaRPr>
+          </a:p>
+        </p:txBody>
+      </p:sp>
+      <p:sp>
+        <p:nvSpPr>
+          <p:cNvPr id="6" name="Text 4"/>
+          <p:cNvSpPr txBox="1"/>
+          <p:nvPr/>
+        </p:nvSpPr>
+        <p:spPr>
+          <a:xfrm>
+            <a:off x="749808" y="4169664"/>
+            <a:ext cx="9692640" cy="1188720"/>
+          </a:xfrm>
+          <a:prstGeom prst="rect">
+            <a:avLst/>
+          </a:prstGeom>
+          <a:noFill/>
+          <a:ln/>
+        </p:spPr>
+        <p:txBody>
+          <a:bodyPr wrap="square" lIns="0" tIns="0" rIns="0" bIns="0" rtlCol="0" anchor="t"/>
+          <a:lstStyle/>
+          <a:p>
+            <a:pPr indent="0" marL="0">
+              <a:lnSpc>
+                <a:spcPct val="106000"/>
+              </a:lnSpc>
+              <a:buNone/>
+            </a:pPr>
+            <a:r>
+              <a:rPr lang="ja-JP" altLang="en-US" sz="2600" dirty="0">
+                <a:solidFill>
+                  <a:srgbClr val="D9E7EC"/>
+                </a:solidFill>
+                <a:latin typeface="Meiryo" pitchFamily="34" charset="0"/>
+                <a:ea typeface="Meiryo" pitchFamily="34" charset="-122"/>
+                <a:cs typeface="Meiryo" pitchFamily="34" charset="-120"/>
+              </a:rPr>
+              <a:t>第3回｜編集・差分・commitを体験し、</a:t>
+            </a:r>
+            <a:endParaRPr lang="ja-JP" sz="2600" dirty="0">
+              <a:latin typeface="Meiryo"/>
+              <a:ea typeface="Meiryo"/>
+              <a:cs typeface="Meiryo"/>
+            </a:endParaRPr>
+          </a:p>
+          <a:p>
+            <a:pPr indent="0" marL="0">
+              <a:lnSpc>
+                <a:spcPct val="106000"/>
+              </a:lnSpc>
+              <a:buNone/>
+            </a:pPr>
+            <a:r>
+              <a:rPr lang="ja-JP" altLang="en-US" sz="2600" dirty="0">
+                <a:solidFill>
+                  <a:srgbClr val="D9E7EC"/>
+                </a:solidFill>
+                <a:latin typeface="Meiryo" pitchFamily="34" charset="0"/>
+                <a:ea typeface="Meiryo" pitchFamily="34" charset="-122"/>
+                <a:cs typeface="Meiryo" pitchFamily="34" charset="-120"/>
+              </a:rPr>
+              <a:t>提出する版を確かめます。</a:t>
+            </a:r>
+            <a:endParaRPr lang="ja-JP" sz="2600" dirty="0">
+              <a:latin typeface="Meiryo"/>
+              <a:ea typeface="Meiryo"/>
+              <a:cs typeface="Meiryo"/>
+            </a:endParaRPr>
+          </a:p>
+        </p:txBody>
+      </p:sp>
+      <p:pic>
+        <p:nvPicPr>
+          <p:cNvPr id="7" name="Image 0" descr="Lucide git-commit-horizontal">    </p:cNvPr>
+          <p:cNvPicPr>
+            <a:picLocks noChangeAspect="1"/>
+          </p:cNvPicPr>
+          <p:nvPr/>
+        </p:nvPicPr>
+        <p:blipFill>
+          <a:blip r:embed="rId1"/>
+          <a:stretch>
+            <a:fillRect/>
+          </a:stretch>
+        </p:blipFill>
+        <p:spPr>
+          <a:xfrm>
+            <a:off x="10497312" y="566928"/>
+            <a:ext cx="841248" cy="841248"/>
+          </a:xfrm>
+          <a:prstGeom prst="rect">
+            <a:avLst/>
+          </a:prstGeom>
+        </p:spPr>
+      </p:pic>
+      <p:sp>
+        <p:nvSpPr>
+          <p:cNvPr id="8" name="Text 5"/>
+          <p:cNvSpPr txBox="1"/>
+          <p:nvPr/>
+        </p:nvSpPr>
+        <p:spPr>
+          <a:xfrm>
+            <a:off x="749808" y="6281928"/>
+            <a:ext cx="9144000" cy="338328"/>
+          </a:xfrm>
+          <a:prstGeom prst="rect">
+            <a:avLst/>
+          </a:prstGeom>
+          <a:noFill/>
+          <a:ln/>
+        </p:spPr>
+        <p:txBody>
+          <a:bodyPr wrap="square" lIns="0" tIns="0" rIns="0" bIns="0" rtlCol="0" anchor="t"/>
+          <a:lstStyle/>
+          <a:p>
+            <a:pPr indent="0" marL="0">
+              <a:lnSpc>
+                <a:spcPct val="106000"/>
+              </a:lnSpc>
+              <a:buNone/>
+            </a:pPr>
+            <a:r>
+              <a:rPr lang="ja-JP" altLang="en-US" sz="1800" dirty="0">
+                <a:solidFill>
+                  <a:srgbClr val="D9E7EC"/>
+                </a:solidFill>
+                <a:latin typeface="Meiryo" pitchFamily="34" charset="0"/>
+                <a:ea typeface="Meiryo" pitchFamily="34" charset="-122"/>
+                <a:cs typeface="Meiryo" pitchFamily="34" charset="-120"/>
+              </a:rPr>
+              <a:t>大学生のためのAI・データリテラシー</a:t>
+            </a:r>
+            <a:endParaRPr lang="ja-JP" sz="1800" dirty="0">
+              <a:latin typeface="Meiryo"/>
+              <a:ea typeface="Meiryo"/>
+              <a:cs typeface="Meiryo"/>
+            </a:endParaRPr>
+          </a:p>
+        </p:txBody>
+      </p:sp>
+      <p:sp>
+        <p:nvSpPr>
+          <p:cNvPr id="9" name="Personal logo white backplate">
+            <a:extLst>
+              <a:ext uri="{FF2B5EF4-FFF2-40B4-BE49-F238E27FC236}">
+                <ns3:creationId id="{1464D463-E5BC-4BFE-BD8A-CDCFE345671F}"/>
+              </a:ext>
+            </a:extLst>
+          </p:cNvPr>
+          <p:cNvSpPr>
+            <a:spLocks noGrp="1"/>
+          </p:cNvSpPr>
+          <p:nvPr/>
+        </p:nvSpPr>
+        <p:spPr>
+          <a:xfrm>
+            <a:off x="685800" y="85725"/>
+            <a:ext cx="1714500" cy="210503"/>
+          </a:xfrm>
+          <a:prstGeom prst="rect">
+            <a:avLst/>
+          </a:prstGeom>
+          <a:solidFill>
+            <a:srgbClr val="FFFFFF"/>
+          </a:solidFill>
+          <a:ln w="0">
+            <a:noFill/>
+          </a:ln>
+        </p:spPr>
+      </p:sp>
+      <p:pic>
+        <p:nvPicPr>
+          <p:cNvPr id="10" name=""/>
+          <p:cNvPicPr>
+            <a:picLocks noChangeAspect="1"/>
+          </p:cNvPicPr>
+          <p:nvPr/>
+        </p:nvPicPr>
+        <p:blipFill>
+          <a:blip r:embed="rIdPersonalAuthorLogo"/>
+          <a:stretch/>
+        </p:blipFill>
+        <p:spPr>
+          <a:xfrm>
+            <a:off x="685800" y="85748"/>
+            <a:ext cx="1714500" cy="210457"/>
+          </a:xfrm>
+          <a:prstGeom prst="rect">
+            <a:avLst/>
+          </a:prstGeom>
+        </p:spPr>
+      </p:pic>
+      <p:sp>
+        <p:nvSpPr>
+          <p:cNvPr id="11" name="Personal author website">
+            <a:extLst>
+              <a:ext uri="{FF2B5EF4-FFF2-40B4-BE49-F238E27FC236}">
+                <ns3:creationId id="{2B199CB2-0940-4D13-9CAC-E3F074FAA0ED}"/>
+              </a:ext>
+            </a:extLst>
+          </p:cNvPr>
+          <p:cNvSpPr>
+            <a:spLocks noGrp="1"/>
+          </p:cNvSpPr>
+          <p:nvPr/>
+        </p:nvSpPr>
+        <p:spPr>
+          <a:xfrm>
+            <a:off x="6286500" y="6477000"/>
+            <a:ext cx="4000500" cy="266700"/>
+          </a:xfrm>
+          <a:prstGeom prst="rect">
+            <a:avLst/>
+          </a:prstGeom>
+          <a:noFill/>
+          <a:ln w="0">
+            <a:noFill/>
+          </a:ln>
+        </p:spPr>
+        <p:txBody>
+          <a:bodyPr>
+            <a:noAutofit/>
+          </a:bodyPr>
+          <a:lstStyle/>
+          <a:p>
+            <a:pPr>
+              <a:defRPr sz="1800">
+                <a:solidFill>
+                  <a:srgbClr val="AECFD2"/>
+                </a:solidFill>
+                <a:latin typeface="Meiryo"/>
+                <a:ea typeface="Meiryo"/>
+                <a:cs typeface="Meiryo"/>
+              </a:defRPr>
+            </a:pPr>
+            <a:r>
+              <a:rPr sz="1800">
+                <a:solidFill>
+                  <a:srgbClr val="AECFD2"/>
+                </a:solidFill>
+                <a:latin typeface="Meiryo"/>
+                <a:ea typeface="Meiryo"/>
+                <a:cs typeface="Meiryo"/>
+              </a:rPr>
+              <a:t>tsuchiyatakahiro.com</a:t>
+            </a:r>
+          </a:p>
+        </p:txBody>
+      </p:sp>
+    </p:spTree>
+  </p:cSld>
+  <p:clrMapOvr>
+    <a:masterClrMapping/>
+  </p:clrMapOvr>
+</p:sld>
 </file>
 
 <file path=ppt/slides/slide10.xml><?xml version="1.0" encoding="utf-8"?>

--- a/slides/Week03_GitHub_Workflow_v1.3.pptx
+++ b/slides/Week03_GitHub_Workflow_v1.3.pptx
@@ -3570,36 +3570,6 @@
           </a:p>
         </p:txBody>
       </p:sp>
-      <p:sp>
-        <p:nvSpPr>
-          <p:cNvPr id="9" name="Personal logo white backplate">
-            <a:extLst>
-              <a:ext uri="{FF2B5EF4-FFF2-40B4-BE49-F238E27FC236}">
-                <ns3:creationId id="{1464D463-E5BC-4BFE-BD8A-CDCFE345671F}"/>
-              </a:ext>
-            </a:extLst>
-          </p:cNvPr>
-          <p:cNvSpPr>
-            <a:spLocks noGrp="1"/>
-          </p:cNvSpPr>
-          <p:nvPr/>
-        </p:nvSpPr>
-        <p:spPr>
-          <a:xfrm>
-            <a:off x="685800" y="85725"/>
-            <a:ext cx="1714500" cy="210503"/>
-          </a:xfrm>
-          <a:prstGeom prst="rect">
-            <a:avLst/>
-          </a:prstGeom>
-          <a:solidFill>
-            <a:srgbClr val="FFFFFF"/>
-          </a:solidFill>
-          <a:ln w="0">
-            <a:noFill/>
-          </a:ln>
-        </p:spPr>
-      </p:sp>
       <p:pic>
         <p:nvPicPr>
           <p:cNvPr id="10" name=""/>
@@ -3609,7 +3579,12 @@
           <p:nvPr/>
         </p:nvPicPr>
         <p:blipFill>
-          <a:blip r:embed="rIdPersonalAuthorLogo"/>
+          <a:blip r:embed="rIdPersonalAuthorLogo">
+            <a:duotone>
+              <a:srgbClr val="FFFFFF"/>
+              <a:srgbClr val="FFFFFF"/>
+            </a:duotone>
+          </a:blip>
           <a:stretch/>
         </p:blipFill>
         <p:spPr>

--- a/slides/Week03_GitHub_Workflow_v1.3.pptx
+++ b/slides/Week03_GitHub_Workflow_v1.3.pptx
@@ -3241,7 +3241,7 @@
 </file>
 
 <file path=ppt/slides/slide1.xml><?xml version="1.0" encoding="utf-8"?>
-<p:sld xmlns:a="http://schemas.openxmlformats.org/drawingml/2006/main" xmlns:ns3="http://schemas.microsoft.com/office/drawing/2014/main" xmlns:p="http://schemas.openxmlformats.org/presentationml/2006/main" xmlns:r="http://schemas.openxmlformats.org/officeDocument/2006/relationships">
+<p:sld xmlns:a="http://schemas.openxmlformats.org/drawingml/2006/main" xmlns:ns3="http://schemas.microsoft.com/office/drawing/2014/main" xmlns:p="http://schemas.openxmlformats.org/presentationml/2006/main" xmlns:r="http://schemas.openxmlformats.org/officeDocument/2006/relationships" showMasterSp="0">
   <p:cSld name="Slide 1">
     <p:bg>
       <p:bgPr>
@@ -3572,25 +3572,20 @@
       </p:sp>
       <p:pic>
         <p:nvPicPr>
-          <p:cNvPr id="10" name=""/>
+          <p:cNvPr id="10" name="" descr="TSUCHIYA TAKAHIRO white logo supplied in Brandeis cover; original bytes reused"/>
           <p:cNvPicPr>
             <a:picLocks noChangeAspect="1"/>
           </p:cNvPicPr>
           <p:nvPr/>
         </p:nvPicPr>
         <p:blipFill>
-          <a:blip r:embed="rIdPersonalAuthorLogo">
-            <a:duotone>
-              <a:srgbClr val="FFFFFF"/>
-              <a:srgbClr val="FFFFFF"/>
-            </a:duotone>
-          </a:blip>
+          <a:blip r:embed="rIdPersonalAuthorLogo"/>
           <a:stretch/>
         </p:blipFill>
         <p:spPr>
           <a:xfrm>
-            <a:off x="685800" y="85748"/>
-            <a:ext cx="1714500" cy="210457"/>
+            <a:off x="3810000" y="109728"/>
+            <a:ext cx="4572000" cy="561219"/>
           </a:xfrm>
           <a:prstGeom prst="rect">
             <a:avLst/>
